--- a/data/employees/EMP060/AST-EMP060-01.pptx
+++ b/data/employees/EMP060/AST-EMP060-01.pptx
@@ -9,6 +9,7 @@
     <p:sldId id="257" r:id="rId8"/>
     <p:sldId id="258" r:id="rId9"/>
     <p:sldId id="259" r:id="rId10"/>
+    <p:sldId id="260" r:id="rId11"/>
   </p:sldIdLst>
   <p:sldSz cx="9144000" cy="6858000" type="screen4x3"/>
   <p:notesSz cx="6858000" cy="9144000"/>
@@ -3098,42 +3099,55 @@
             <a:spLocks noGrp="1"/>
           </p:cNvSpPr>
           <p:nvPr>
-            <p:ph type="ctrTitle"/>
-          </p:nvPr>
-        </p:nvSpPr>
-        <p:spPr/>
-        <p:txBody>
-          <a:bodyPr/>
-          <a:lstStyle/>
-          <a:p>
-            <a:r>
-              <a:t>Project update deck - EMP060</a:t>
-            </a:r>
-          </a:p>
-        </p:txBody>
-      </p:sp>
-      <p:sp>
-        <p:nvSpPr>
-          <p:cNvPr id="3" name="Subtitle 2"/>
-          <p:cNvSpPr>
-            <a:spLocks noGrp="1"/>
-          </p:cNvSpPr>
-          <p:nvPr>
-            <p:ph type="subTitle" idx="1"/>
-          </p:nvPr>
-        </p:nvSpPr>
-        <p:spPr/>
-        <p:txBody>
-          <a:bodyPr/>
-          <a:lstStyle/>
-          <a:p>
-            <a:r>
-              <a:t>Skyler Chen | Analyst | Finance</a:t>
-            </a:r>
-          </a:p>
-          <a:p>
-            <a:r>
-              <a:t>Prepared: 2025-03-03</a:t>
+            <p:ph type="title"/>
+          </p:nvPr>
+        </p:nvSpPr>
+        <p:spPr/>
+        <p:txBody>
+          <a:bodyPr/>
+          <a:lstStyle/>
+          <a:p>
+            <a:r>
+              <a:t>Ast Emp060 01 - EMP060</a:t>
+            </a:r>
+          </a:p>
+        </p:txBody>
+      </p:sp>
+      <p:sp>
+        <p:nvSpPr>
+          <p:cNvPr id="3" name="Content Placeholder 2"/>
+          <p:cNvSpPr>
+            <a:spLocks noGrp="1"/>
+          </p:cNvSpPr>
+          <p:nvPr>
+            <p:ph idx="1"/>
+          </p:nvPr>
+        </p:nvSpPr>
+        <p:spPr/>
+        <p:txBody>
+          <a:bodyPr/>
+          <a:lstStyle/>
+          <a:p>
+            <a:r>
+              <a:t>Slide 1: Executive Summary</a:t>
+            </a:r>
+          </a:p>
+          <a:p>
+            <a:pPr lvl="1"/>
+            <a:r>
+              <a:t>Section 1: Automation backlog refinement. EMP060 contributes to ast emp060 01 through recurring collaboration, clear ownership boundaries, and measurable outcomes. The team captures decisions, open issues, and handoffs so that knowledge remains discoverable for future programs.</a:t>
+            </a:r>
+          </a:p>
+          <a:p>
+            <a:pPr lvl="1"/>
+            <a:r>
+              <a:t>Section 2: Data quality remediation. EMP060 contributes to ast emp060 01 through recurring collaboration, clear ownership boundaries, and measurable outcomes. The team captures decisions, open issues, and handoffs so that knowledge remains discoverable for future programs.</a:t>
+            </a:r>
+          </a:p>
+          <a:p>
+            <a:pPr lvl="1"/>
+            <a:r>
+              <a:t>Section 3: Department KPI performance. EMP060 contributes to ast emp060 01 through recurring collaboration, clear ownership boundaries, and measurable outcomes. The team captures decisions, open issues, and handoffs so that knowledge remains discoverable for future programs.</a:t>
             </a:r>
           </a:p>
         </p:txBody>
@@ -3172,7 +3186,7 @@
           <a:lstStyle/>
           <a:p>
             <a:r>
-              <a:t>Q2 Budget Variance Report</a:t>
+              <a:t>Ast Emp060 01 - EMP060</a:t>
             </a:r>
           </a:p>
         </p:txBody>
@@ -3193,17 +3207,25 @@
           <a:lstStyle/>
           <a:p>
             <a:r>
-              <a:t>Overview of Q2 Budget Variance Report for Finance department.</a:t>
-            </a:r>
-          </a:p>
-          <a:p>
-            <a:r>
-              <a:t>Responsible: Skyler Chen (Analyst)</a:t>
-            </a:r>
-          </a:p>
-          <a:p>
-            <a:r>
-              <a:t>Location: Hsinchu | Skills: MLOps, Ontology, Fabric, Synapse</a:t>
+              <a:t>Slide 2: Executive Summary</a:t>
+            </a:r>
+          </a:p>
+          <a:p>
+            <a:pPr lvl="1"/>
+            <a:r>
+              <a:t>Section 1: Knowledge transfer and onboarding. EMP060 contributes to ast emp060 01 through recurring collaboration, clear ownership boundaries, and measurable outcomes. The team captures decisions, open issues, and handoffs so that knowledge remains discoverable for future programs.</a:t>
+            </a:r>
+          </a:p>
+          <a:p>
+            <a:pPr lvl="1"/>
+            <a:r>
+              <a:t>Section 2: Department KPI performance. EMP060 contributes to ast emp060 01 through recurring collaboration, clear ownership boundaries, and measurable outcomes. The team captures decisions, open issues, and handoffs so that knowledge remains discoverable for future programs.</a:t>
+            </a:r>
+          </a:p>
+          <a:p>
+            <a:pPr lvl="1"/>
+            <a:r>
+              <a:t>Section 3: Quarterly delivery milestones. EMP060 contributes to ast emp060 01 through recurring collaboration, clear ownership boundaries, and measurable outcomes. The team captures decisions, open issues, and handoffs so that knowledge remains discoverable for future programs.</a:t>
             </a:r>
           </a:p>
         </p:txBody>
@@ -3242,7 +3264,7 @@
           <a:lstStyle/>
           <a:p>
             <a:r>
-              <a:t>CapEx vs OpEx Analysis</a:t>
+              <a:t>Ast Emp060 01 - EMP060</a:t>
             </a:r>
           </a:p>
         </p:txBody>
@@ -3263,17 +3285,25 @@
           <a:lstStyle/>
           <a:p>
             <a:r>
-              <a:t>Overview of CapEx vs OpEx Analysis for Finance department.</a:t>
-            </a:r>
-          </a:p>
-          <a:p>
-            <a:r>
-              <a:t>Responsible: Skyler Chen (Analyst)</a:t>
-            </a:r>
-          </a:p>
-          <a:p>
-            <a:r>
-              <a:t>Location: Hsinchu | Skills: MLOps, Ontology, Fabric, Synapse</a:t>
+              <a:t>Slide 3: Executive Summary</a:t>
+            </a:r>
+          </a:p>
+          <a:p>
+            <a:pPr lvl="1"/>
+            <a:r>
+              <a:t>Section 1: Customer escalation analysis. EMP060 contributes to ast emp060 01 through recurring collaboration, clear ownership boundaries, and measurable outcomes. The team captures decisions, open issues, and handoffs so that knowledge remains discoverable for future programs.</a:t>
+            </a:r>
+          </a:p>
+          <a:p>
+            <a:pPr lvl="1"/>
+            <a:r>
+              <a:t>Section 2: Data quality remediation. EMP060 contributes to ast emp060 01 through recurring collaboration, clear ownership boundaries, and measurable outcomes. The team captures decisions, open issues, and handoffs so that knowledge remains discoverable for future programs.</a:t>
+            </a:r>
+          </a:p>
+          <a:p>
+            <a:pPr lvl="1"/>
+            <a:r>
+              <a:t>Section 3: Customer escalation analysis. EMP060 contributes to ast emp060 01 through recurring collaboration, clear ownership boundaries, and measurable outcomes. The team captures decisions, open issues, and handoffs so that knowledge remains discoverable for future programs.</a:t>
             </a:r>
           </a:p>
         </p:txBody>
@@ -3312,7 +3342,7 @@
           <a:lstStyle/>
           <a:p>
             <a:r>
-              <a:t>Forecast Accuracy Metrics</a:t>
+              <a:t>Ast Emp060 01 - EMP060</a:t>
             </a:r>
           </a:p>
         </p:txBody>
@@ -3333,17 +3363,103 @@
           <a:lstStyle/>
           <a:p>
             <a:r>
-              <a:t>Overview of Forecast Accuracy Metrics for Finance department.</a:t>
-            </a:r>
-          </a:p>
-          <a:p>
-            <a:r>
-              <a:t>Responsible: Skyler Chen (Analyst)</a:t>
-            </a:r>
-          </a:p>
-          <a:p>
-            <a:r>
-              <a:t>Location: Hsinchu | Skills: MLOps, Ontology, Fabric, Synapse</a:t>
+              <a:t>Slide 4: Executive Summary</a:t>
+            </a:r>
+          </a:p>
+          <a:p>
+            <a:pPr lvl="1"/>
+            <a:r>
+              <a:t>Section 1: Data quality remediation. EMP060 contributes to ast emp060 01 through recurring collaboration, clear ownership boundaries, and measurable outcomes. The team captures decisions, open issues, and handoffs so that knowledge remains discoverable for future programs.</a:t>
+            </a:r>
+          </a:p>
+          <a:p>
+            <a:pPr lvl="1"/>
+            <a:r>
+              <a:t>Section 2: Customer escalation analysis. EMP060 contributes to ast emp060 01 through recurring collaboration, clear ownership boundaries, and measurable outcomes. The team captures decisions, open issues, and handoffs so that knowledge remains discoverable for future programs.</a:t>
+            </a:r>
+          </a:p>
+          <a:p>
+            <a:pPr lvl="1"/>
+            <a:r>
+              <a:t>Section 3: Knowledge transfer and onboarding. EMP060 contributes to ast emp060 01 through recurring collaboration, clear ownership boundaries, and measurable outcomes. The team captures decisions, open issues, and handoffs so that knowledge remains discoverable for future programs.</a:t>
+            </a:r>
+          </a:p>
+        </p:txBody>
+      </p:sp>
+    </p:spTree>
+  </p:cSld>
+  <p:clrMapOvr>
+    <a:masterClrMapping/>
+  </p:clrMapOvr>
+</p:sld>
+</file>
+
+<file path=ppt/slides/slide5.xml><?xml version="1.0" encoding="utf-8"?>
+<p:sld xmlns:a="http://schemas.openxmlformats.org/drawingml/2006/main" xmlns:p="http://schemas.openxmlformats.org/presentationml/2006/main" xmlns:r="http://schemas.openxmlformats.org/officeDocument/2006/relationships">
+  <p:cSld>
+    <p:spTree>
+      <p:nvGrpSpPr>
+        <p:cNvPr id="1" name=""/>
+        <p:cNvGrpSpPr/>
+        <p:nvPr/>
+      </p:nvGrpSpPr>
+      <p:grpSpPr/>
+      <p:sp>
+        <p:nvSpPr>
+          <p:cNvPr id="2" name="Title 1"/>
+          <p:cNvSpPr>
+            <a:spLocks noGrp="1"/>
+          </p:cNvSpPr>
+          <p:nvPr>
+            <p:ph type="title"/>
+          </p:nvPr>
+        </p:nvSpPr>
+        <p:spPr/>
+        <p:txBody>
+          <a:bodyPr/>
+          <a:lstStyle/>
+          <a:p>
+            <a:r>
+              <a:t>Ast Emp060 01 - EMP060</a:t>
+            </a:r>
+          </a:p>
+        </p:txBody>
+      </p:sp>
+      <p:sp>
+        <p:nvSpPr>
+          <p:cNvPr id="3" name="Content Placeholder 2"/>
+          <p:cNvSpPr>
+            <a:spLocks noGrp="1"/>
+          </p:cNvSpPr>
+          <p:nvPr>
+            <p:ph idx="1"/>
+          </p:nvPr>
+        </p:nvSpPr>
+        <p:spPr/>
+        <p:txBody>
+          <a:bodyPr/>
+          <a:lstStyle/>
+          <a:p>
+            <a:r>
+              <a:t>Slide 5: Executive Summary</a:t>
+            </a:r>
+          </a:p>
+          <a:p>
+            <a:pPr lvl="1"/>
+            <a:r>
+              <a:t>Section 1: Automation backlog refinement. EMP060 contributes to ast emp060 01 through recurring collaboration, clear ownership boundaries, and measurable outcomes. The team captures decisions, open issues, and handoffs so that knowledge remains discoverable for future programs.</a:t>
+            </a:r>
+          </a:p>
+          <a:p>
+            <a:pPr lvl="1"/>
+            <a:r>
+              <a:t>Section 2: Knowledge transfer and onboarding. EMP060 contributes to ast emp060 01 through recurring collaboration, clear ownership boundaries, and measurable outcomes. The team captures decisions, open issues, and handoffs so that knowledge remains discoverable for future programs.</a:t>
+            </a:r>
+          </a:p>
+          <a:p>
+            <a:pPr lvl="1"/>
+            <a:r>
+              <a:t>Section 3: Automation backlog refinement. EMP060 contributes to ast emp060 01 through recurring collaboration, clear ownership boundaries, and measurable outcomes. The team captures decisions, open issues, and handoffs so that knowledge remains discoverable for future programs.</a:t>
             </a:r>
           </a:p>
         </p:txBody>
